--- a/BioPilot/03_deliverables/Part1_Gait_Model_Migration.pptx
+++ b/BioPilot/03_deliverables/Part1_Gait_Model_Migration.pptx
@@ -2948,7 +2948,30 @@
                 <a:ea typeface="Calibri" pitchFamily="34" charset="-122"/>
                 <a:cs typeface="Calibri" pitchFamily="34" charset="-120"/>
               </a:rPr>
-              <a:t>A depth camera records a person doing simple movements (walking, standing, sit-to-stand) as a moving 3-D stick figure.</a:t>
+              <a:t>A depth camera records a person doing simple movements (walking, standing, sit-to-stand)</a:t>
+            </a:r>
+          </a:p>
+          <a:p>
+            <a:pPr marL="203200" indent="-203200">
+              <a:lnSpc>
+                <a:spcPts val="2200"/>
+              </a:lnSpc>
+              <a:spcAft>
+                <a:spcPts val="1200"/>
+              </a:spcAft>
+              <a:buSzPct val="100000"/>
+              <a:buChar char="•"/>
+            </a:pPr>
+            <a:r>
+              <a:rPr lang="en-US" sz="1500" dirty="0">
+                <a:solidFill>
+                  <a:srgbClr val="122A3A"/>
+                </a:solidFill>
+                <a:latin typeface="Calibri" pitchFamily="34" charset="0"/>
+                <a:ea typeface="Calibri" pitchFamily="34" charset="-122"/>
+                <a:cs typeface="Calibri" pitchFamily="34" charset="-120"/>
+              </a:rPr>
+              <a:t>Pre-processing video into a moving 3-D stick figure.</a:t>
             </a:r>
             <a:endParaRPr lang="en-US" sz="1500" dirty="0"/>
           </a:p>

--- a/BioPilot/03_deliverables/Part1_Gait_Model_Migration.pptx
+++ b/BioPilot/03_deliverables/Part1_Gait_Model_Migration.pptx
@@ -119,6 +119,32 @@
     </p:ext>
   </p:extLst>
 </p:presentation>
+</file>
+
+<file path=ppt/commentAuthors.xml><?xml version="1.0" encoding="utf-8"?>
+<p:cmAuthorLst xmlns:a="http://schemas.openxmlformats.org/drawingml/2006/main" xmlns:r="http://schemas.openxmlformats.org/officeDocument/2006/relationships" xmlns:p="http://schemas.openxmlformats.org/presentationml/2006/main">
+  <p:cmAuthor id="1" name="Tzur, Nitsan" initials="TN" lastIdx="1" clrIdx="0">
+    <p:extLst>
+      <p:ext uri="{19B8F6BF-5375-455C-9EA6-DF929625EA0E}">
+        <p15:presenceInfo xmlns:p15="http://schemas.microsoft.com/office/powerpoint/2012/main" userId="S::nitsant@bu.edu::d92b19c8-0397-40b0-a253-25ff1ca23f39" providerId="AD"/>
+      </p:ext>
+    </p:extLst>
+  </p:cmAuthor>
+</p:cmAuthorLst>
+</file>
+
+<file path=ppt/comments/comment1.xml><?xml version="1.0" encoding="utf-8"?>
+<p:cmLst xmlns:a="http://schemas.openxmlformats.org/drawingml/2006/main" xmlns:r="http://schemas.openxmlformats.org/officeDocument/2006/relationships" xmlns:p="http://schemas.openxmlformats.org/presentationml/2006/main">
+  <p:cm authorId="1" dt="2026-08-14T14:55:13.145" idx="1">
+    <p:pos x="10" y="10"/>
+    <p:text>Maybe we should </p:text>
+    <p:extLst>
+      <p:ext uri="{C676402C-5697-4E1C-873F-D02D1690AC5C}">
+        <p15:threadingInfo xmlns:p15="http://schemas.microsoft.com/office/powerpoint/2012/main" timeZoneBias="240"/>
+      </p:ext>
+    </p:extLst>
+  </p:cm>
+</p:cmLst>
 </file>
 
 <file path=ppt/notesMasters/notesMaster1.xml><?xml version="1.0" encoding="utf-8"?>
@@ -1853,7 +1879,7 @@
                 <a:ea typeface="Cambria" pitchFamily="34" charset="-122"/>
                 <a:cs typeface="Cambria" pitchFamily="34" charset="-120"/>
               </a:rPr>
-              <a:t>The model runs in-house, end to end —</a:t>
+              <a:t>The model runs in-house, end to end </a:t>
             </a:r>
             <a:endParaRPr lang="en-US" sz="3400" dirty="0"/>
           </a:p>
@@ -1912,7 +1938,7 @@
                 <a:ea typeface="Calibri" pitchFamily="34" charset="-122"/>
                 <a:cs typeface="Calibri" pitchFamily="34" charset="-120"/>
               </a:rPr>
-              <a:t>Working in-house model  ·  source code  ·  integration notes  —  delivered.</a:t>
+              <a:t>Working in-house model  ·  source code  ·  integration notes - delivered.</a:t>
             </a:r>
             <a:endParaRPr lang="en-US" sz="1700" dirty="0"/>
           </a:p>
@@ -1990,7 +2016,7 @@
                 <a:ea typeface="Calibri" pitchFamily="34" charset="-122"/>
                 <a:cs typeface="Calibri" pitchFamily="34" charset="-120"/>
               </a:rPr>
-              <a:t>Doc BP-PO008-001 · v1.0 Draft — for Newton review · reviewed / approved by Newton VP R&amp;D.</a:t>
+              <a:t>Doc BP-PO008-001 · v1.0 Draft for Newton review · reviewed / approved by Newton VP R&amp;D.</a:t>
             </a:r>
             <a:endParaRPr lang="en-US" sz="1250" dirty="0"/>
           </a:p>
@@ -2208,7 +2234,7 @@
                 <a:ea typeface="Calibri" pitchFamily="34" charset="-122"/>
                 <a:cs typeface="Calibri" pitchFamily="34" charset="-120"/>
               </a:rPr>
-              <a:t>Take the gait foundation model — co-authored with the Weizmann research team and described in the recent paper — and make it run reliably inside Newton's own environment, then prove it works from start to finish.</a:t>
+              <a:t>Take the gait foundation model, co-authored with the Weizmann research team and described in the recent paper, and make it run reliably inside Newton's own environment, then prove it works from start to finish.</a:t>
             </a:r>
             <a:endParaRPr lang="en-US" sz="1600" dirty="0"/>
           </a:p>
@@ -2995,7 +3021,7 @@
                 <a:ea typeface="Calibri" pitchFamily="34" charset="-122"/>
                 <a:cs typeface="Calibri" pitchFamily="34" charset="-120"/>
               </a:rPr>
-              <a:t>The model has learned what healthy human movement looks like — so well it can redraw a person's motion from a partial view, accurate to about 8 millimetres.</a:t>
+              <a:t>The model has learned what healthy human movement looks like to a point it can redraw a person's motion from a partial view, accurate to about 8 millimetres.</a:t>
             </a:r>
             <a:endParaRPr lang="en-US" sz="1500" dirty="0"/>
           </a:p>
@@ -3016,7 +3042,7 @@
                 <a:ea typeface="Calibri" pitchFamily="34" charset="-122"/>
                 <a:cs typeface="Calibri" pitchFamily="34" charset="-120"/>
               </a:rPr>
-              <a:t>In doing so it produces a compact “movement fingerprint” for each recording — 1,024 numbers that capture how someone moves. Those fingerprints are what we predict health traits from.</a:t>
+              <a:t>In doing so it produces a compact “movement fingerprint” for each recording (1,024 numbers) that capture how someone moves. Those fingerprints are what we predict health traits from.</a:t>
             </a:r>
             <a:endParaRPr lang="en-US" sz="1500" dirty="0"/>
           </a:p>
@@ -3308,7 +3334,7 @@
                 <a:ea typeface="Calibri" pitchFamily="34" charset="-122"/>
                 <a:cs typeface="Calibri" pitchFamily="34" charset="-120"/>
               </a:rPr>
-              <a:t>A clean, native install on Newton's Apple-Silicon Mac (cloud/GPU path documented too) — fixing a broken, mismatched setup.</a:t>
+              <a:t>A clean, native install on Newton's Apple-Silicon Mac (cloud/GPU path documented too).</a:t>
             </a:r>
             <a:endParaRPr lang="en-US" sz="1600" dirty="0"/>
           </a:p>
@@ -3546,7 +3572,7 @@
                 <a:ea typeface="Calibri" pitchFamily="34" charset="-122"/>
                 <a:cs typeface="Calibri" pitchFamily="34" charset="-120"/>
               </a:rPr>
-              <a:t>Confirmed it reconstructs movement to ~8 mm — the same accuracy reported in the paper.</a:t>
+              <a:t>Confirmed it reconstructs movement to ~8 mm, the same accuracy reported in the paper.</a:t>
             </a:r>
             <a:endParaRPr lang="en-US" sz="1600" dirty="0"/>
           </a:p>
@@ -3665,7 +3691,7 @@
                 <a:ea typeface="Calibri" pitchFamily="34" charset="-122"/>
                 <a:cs typeface="Calibri" pitchFamily="34" charset="-120"/>
               </a:rPr>
-              <a:t>Streamed recordings directly from Newton's cloud (S3) storage — without keeping any sensitive files on the machine.</a:t>
+              <a:t>Streamed recordings directly from Newton's cloud (S3) storage, without keeping any sensitive files on the machine.</a:t>
             </a:r>
             <a:endParaRPr lang="en-US" sz="1600" dirty="0"/>
           </a:p>
@@ -3937,27 +3963,7 @@
                 <a:ea typeface="Calibri" pitchFamily="34" charset="-122"/>
                 <a:cs typeface="Calibri" pitchFamily="34" charset="-120"/>
               </a:rPr>
-              <a:t>Using only the movement fingerprints, we predicted age, body-mass index (BMI) and sex for 3,643 people —</a:t>
-            </a:r>
-            <a:endParaRPr lang="en-US" sz="1500" dirty="0"/>
-          </a:p>
-          <a:p>
-            <a:pPr marL="0" indent="0">
-              <a:lnSpc>
-                <a:spcPts val="2200"/>
-              </a:lnSpc>
-              <a:buNone/>
-            </a:pPr>
-            <a:r>
-              <a:rPr lang="en-US" sz="1500" dirty="0">
-                <a:solidFill>
-                  <a:srgbClr val="C7D6E0"/>
-                </a:solidFill>
-                <a:latin typeface="Calibri" pitchFamily="34" charset="0"/>
-                <a:ea typeface="Calibri" pitchFamily="34" charset="-122"/>
-                <a:cs typeface="Calibri" pitchFamily="34" charset="-120"/>
-              </a:rPr>
-              <a:t>the paper's headline result — and matched the published numbers.</a:t>
+              <a:t>Using only the movement fingerprints, we predicted age, body-mass index (BMI) and sex for 3,643 people, the paper's headline result and matched the published numbers.</a:t>
             </a:r>
             <a:endParaRPr lang="en-US" sz="1500" dirty="0"/>
           </a:p>
@@ -4455,7 +4461,7 @@
                 <a:ea typeface="Calibri" pitchFamily="34" charset="-122"/>
                 <a:cs typeface="Calibri" pitchFamily="34" charset="-120"/>
               </a:rPr>
-              <a:t>Movement carries real physiological signal — the basis for Newton's downstream health analytics.</a:t>
+              <a:t>Movement carries real physiological signal, the basis for Newton's downstream health analytics.</a:t>
             </a:r>
             <a:endParaRPr lang="en-US" sz="1400" dirty="0"/>
           </a:p>
@@ -4581,7 +4587,7 @@
           <p:nvPr>
             <p:extLst>
               <p:ext uri="{D42A27DB-BD31-4B8C-83A1-F6EECF244321}">
-                <p14:modId xmlns:p14="http://schemas.microsoft.com/office/powerpoint/2010/main" val="1579011935"/>
+                <p14:modId xmlns:p14="http://schemas.microsoft.com/office/powerpoint/2010/main" val="2457712526"/>
               </p:ext>
             </p:extLst>
           </p:nvPr>
@@ -5036,7 +5042,7 @@
                           <a:ea typeface="Calibri" pitchFamily="34" charset="-122"/>
                           <a:cs typeface="Calibri" pitchFamily="34" charset="-120"/>
                         </a:rPr>
-                        <a:t>BMI — men</a:t>
+                        <a:t>BMI - men</a:t>
                       </a:r>
                       <a:endParaRPr lang="en-US" sz="1400" dirty="0">
                         <a:latin typeface="Calibri" charset="0"/>
@@ -5247,7 +5253,7 @@
                           <a:ea typeface="Calibri" pitchFamily="34" charset="-122"/>
                           <a:cs typeface="Calibri" pitchFamily="34" charset="-120"/>
                         </a:rPr>
-                        <a:t>BMI — women</a:t>
+                        <a:t>BMI - women</a:t>
                       </a:r>
                       <a:endParaRPr lang="en-US" sz="1400" dirty="0">
                         <a:latin typeface="Calibri" charset="0"/>
@@ -5458,7 +5464,7 @@
                           <a:ea typeface="Calibri" pitchFamily="34" charset="-122"/>
                           <a:cs typeface="Calibri" pitchFamily="34" charset="-120"/>
                         </a:rPr>
-                        <a:t>Age — men</a:t>
+                        <a:t>Age - men</a:t>
                       </a:r>
                       <a:endParaRPr lang="en-US" sz="1400" dirty="0">
                         <a:latin typeface="Calibri" charset="0"/>
@@ -5669,7 +5675,29 @@
                           <a:ea typeface="Calibri" pitchFamily="34" charset="-122"/>
                           <a:cs typeface="Calibri" pitchFamily="34" charset="-120"/>
                         </a:rPr>
-                        <a:t>Age — women</a:t>
+                        <a:t>Age</a:t>
+                      </a:r>
+                      <a:r>
+                        <a:rPr lang="he-IL" sz="1400" dirty="0">
+                          <a:solidFill>
+                            <a:srgbClr val="122A3A"/>
+                          </a:solidFill>
+                          <a:latin typeface="Calibri" pitchFamily="34" charset="0"/>
+                          <a:ea typeface="Calibri" pitchFamily="34" charset="-122"/>
+                          <a:cs typeface="Calibri" pitchFamily="34" charset="-120"/>
+                        </a:rPr>
+                        <a:t> - </a:t>
+                      </a:r>
+                      <a:r>
+                        <a:rPr lang="en-US" sz="1400" dirty="0">
+                          <a:solidFill>
+                            <a:srgbClr val="122A3A"/>
+                          </a:solidFill>
+                          <a:latin typeface="Calibri" pitchFamily="34" charset="0"/>
+                          <a:ea typeface="Calibri" pitchFamily="34" charset="-122"/>
+                          <a:cs typeface="Calibri" pitchFamily="34" charset="-120"/>
+                        </a:rPr>
+                        <a:t>women</a:t>
                       </a:r>
                       <a:endParaRPr lang="en-US" sz="1400" dirty="0">
                         <a:latin typeface="Calibri" charset="0"/>
@@ -5981,7 +6009,7 @@
                 <a:ea typeface="Calibri" pitchFamily="34" charset="-122"/>
                 <a:cs typeface="Calibri" pitchFamily="34" charset="-120"/>
               </a:rPr>
-              <a:t>Numbers are correlation / accuracy — higher is better, 1.0 is perfect.</a:t>
+              <a:t>Numbers are correlation / accuracy  (higher is better) 1.0 is perfect.</a:t>
             </a:r>
             <a:endParaRPr lang="en-US" sz="1350" dirty="0"/>
           </a:p>
@@ -6761,7 +6789,7 @@
                 <a:ea typeface="Calibri" pitchFamily="34" charset="-122"/>
                 <a:cs typeface="Calibri" pitchFamily="34" charset="-120"/>
               </a:rPr>
-              <a:t>Two clean, reusable Python modules: a streaming extractor and the analysis/probe — no notebook required.</a:t>
+              <a:t>Two clean, reusable Python modules: a streaming extractor and the analysis/probe.</a:t>
             </a:r>
             <a:endParaRPr lang="en-US" sz="1350" dirty="0"/>
           </a:p>
@@ -7127,7 +7155,7 @@
                 <a:ea typeface="Calibri" pitchFamily="34" charset="-122"/>
                 <a:cs typeface="Calibri" pitchFamily="34" charset="-120"/>
               </a:rPr>
-              <a:t>Environment, data flow, how to run, and known limitations — this report plus the written notes.</a:t>
+              <a:t>Environment, data flow, how to run, and known limitations, this report plus the written notes.</a:t>
             </a:r>
             <a:endParaRPr lang="en-US" sz="1350" dirty="0"/>
           </a:p>
@@ -7323,7 +7351,7 @@
                 <a:ea typeface="Calibri" pitchFamily="34" charset="-122"/>
                 <a:cs typeface="Calibri" pitchFamily="34" charset="-120"/>
               </a:rPr>
-              <a:t>This validates the model on age, BMI and sex — the paper's broader 18-body-system phenotypes are future work.</a:t>
+              <a:t>This validates the model on age, BMI and sex. The paper's broader 18-body-system phenotypes are future work.</a:t>
             </a:r>
             <a:endParaRPr lang="en-US" sz="1400" dirty="0"/>
           </a:p>
@@ -7347,7 +7375,7 @@
                 <a:ea typeface="Calibri" pitchFamily="34" charset="-122"/>
                 <a:cs typeface="Calibri" pitchFamily="34" charset="-120"/>
               </a:rPr>
-              <a:t>Visceral-fat (VAT) prediction from the paper is excluded — that label isn't in Newton's data.</a:t>
+              <a:t>Visceral-fat (VAT) prediction from the paper is excluded, as that label isn't in Newton's data.</a:t>
             </a:r>
             <a:endParaRPr lang="en-US" sz="1400" dirty="0"/>
           </a:p>
@@ -7368,7 +7396,7 @@
                 <a:ea typeface="Calibri" pitchFamily="34" charset="-122"/>
                 <a:cs typeface="Calibri" pitchFamily="34" charset="-120"/>
               </a:rPr>
-              <a:t>A small residual gap (≈ 0.02) to the paper remains — attributable to cohort and aggregation details, not the model.</a:t>
+              <a:t>A small residual gap (≈ 0.02) to the paper remains attributable to cohort and aggregation details, not the model.</a:t>
             </a:r>
             <a:endParaRPr lang="en-US" sz="1400" dirty="0"/>
           </a:p>
@@ -7577,7 +7605,7 @@
                 <a:ea typeface="Calibri" pitchFamily="34" charset="-122"/>
                 <a:cs typeface="Calibri" pitchFamily="34" charset="-120"/>
               </a:rPr>
-              <a:t>The model and training pipeline are jointly-owned (master agreement §5.6) — flag for IP review before any external sharing. Recordings are subject-level and stay within Newton's environment; nothing is stored on local machines or committed to version control.</a:t>
+              <a:t>The model and training pipeline are jointly-owned (master agreement §5.6). Recordings are subject-level and stay within Newton's environment; nothing is stored on local machines.</a:t>
             </a:r>
             <a:endParaRPr lang="en-US" sz="1350" dirty="0"/>
           </a:p>
